--- a/dashboard/Database Performance Monitoring & Optimization System.pptx
+++ b/dashboard/Database Performance Monitoring & Optimization System.pptx
@@ -217,7 +217,7 @@
           <a:p>
             <a:fld id="{8988FA63-06C2-4370-8EF6-1412FE8ABE08}" type="datetimeFigureOut">
               <a:rPr lang="en-US" smtClean="0"/>
-              <a:t>3/24/2026</a:t>
+              <a:t>3/28/2026</a:t>
             </a:fld>
             <a:endParaRPr lang="en-US"/>
           </a:p>
@@ -747,7 +747,7 @@
           <a:p>
             <a:fld id="{5BCAD085-E8A6-8845-BD4E-CB4CCA059FC4}" type="datetimeFigureOut">
               <a:rPr lang="en-US" smtClean="0"/>
-              <a:t>3/24/2026</a:t>
+              <a:t>3/28/2026</a:t>
             </a:fld>
             <a:endParaRPr lang="en-US"/>
           </a:p>
@@ -915,7 +915,7 @@
           <a:p>
             <a:fld id="{5BCAD085-E8A6-8845-BD4E-CB4CCA059FC4}" type="datetimeFigureOut">
               <a:rPr lang="en-US" smtClean="0"/>
-              <a:t>3/24/2026</a:t>
+              <a:t>3/28/2026</a:t>
             </a:fld>
             <a:endParaRPr lang="en-US"/>
           </a:p>
@@ -1093,7 +1093,7 @@
           <a:p>
             <a:fld id="{5BCAD085-E8A6-8845-BD4E-CB4CCA059FC4}" type="datetimeFigureOut">
               <a:rPr lang="en-US" smtClean="0"/>
-              <a:t>3/24/2026</a:t>
+              <a:t>3/28/2026</a:t>
             </a:fld>
             <a:endParaRPr lang="en-US"/>
           </a:p>
@@ -1261,7 +1261,7 @@
           <a:p>
             <a:fld id="{5BCAD085-E8A6-8845-BD4E-CB4CCA059FC4}" type="datetimeFigureOut">
               <a:rPr lang="en-US" smtClean="0"/>
-              <a:t>3/24/2026</a:t>
+              <a:t>3/28/2026</a:t>
             </a:fld>
             <a:endParaRPr lang="en-US"/>
           </a:p>
@@ -1506,7 +1506,7 @@
           <a:p>
             <a:fld id="{5BCAD085-E8A6-8845-BD4E-CB4CCA059FC4}" type="datetimeFigureOut">
               <a:rPr lang="en-US" smtClean="0"/>
-              <a:t>3/24/2026</a:t>
+              <a:t>3/28/2026</a:t>
             </a:fld>
             <a:endParaRPr lang="en-US"/>
           </a:p>
@@ -1791,7 +1791,7 @@
           <a:p>
             <a:fld id="{5BCAD085-E8A6-8845-BD4E-CB4CCA059FC4}" type="datetimeFigureOut">
               <a:rPr lang="en-US" smtClean="0"/>
-              <a:t>3/24/2026</a:t>
+              <a:t>3/28/2026</a:t>
             </a:fld>
             <a:endParaRPr lang="en-US"/>
           </a:p>
@@ -2210,7 +2210,7 @@
           <a:p>
             <a:fld id="{5BCAD085-E8A6-8845-BD4E-CB4CCA059FC4}" type="datetimeFigureOut">
               <a:rPr lang="en-US" smtClean="0"/>
-              <a:t>3/24/2026</a:t>
+              <a:t>3/28/2026</a:t>
             </a:fld>
             <a:endParaRPr lang="en-US"/>
           </a:p>
@@ -2327,7 +2327,7 @@
           <a:p>
             <a:fld id="{5BCAD085-E8A6-8845-BD4E-CB4CCA059FC4}" type="datetimeFigureOut">
               <a:rPr lang="en-US" smtClean="0"/>
-              <a:t>3/24/2026</a:t>
+              <a:t>3/28/2026</a:t>
             </a:fld>
             <a:endParaRPr lang="en-US"/>
           </a:p>
@@ -2422,7 +2422,7 @@
           <a:p>
             <a:fld id="{5BCAD085-E8A6-8845-BD4E-CB4CCA059FC4}" type="datetimeFigureOut">
               <a:rPr lang="en-US" smtClean="0"/>
-              <a:t>3/24/2026</a:t>
+              <a:t>3/28/2026</a:t>
             </a:fld>
             <a:endParaRPr lang="en-US"/>
           </a:p>
@@ -2697,7 +2697,7 @@
           <a:p>
             <a:fld id="{5BCAD085-E8A6-8845-BD4E-CB4CCA059FC4}" type="datetimeFigureOut">
               <a:rPr lang="en-US" smtClean="0"/>
-              <a:t>3/24/2026</a:t>
+              <a:t>3/28/2026</a:t>
             </a:fld>
             <a:endParaRPr lang="en-US"/>
           </a:p>
@@ -2949,7 +2949,7 @@
           <a:p>
             <a:fld id="{5BCAD085-E8A6-8845-BD4E-CB4CCA059FC4}" type="datetimeFigureOut">
               <a:rPr lang="en-US" smtClean="0"/>
-              <a:t>3/24/2026</a:t>
+              <a:t>3/28/2026</a:t>
             </a:fld>
             <a:endParaRPr lang="en-US"/>
           </a:p>
@@ -3160,7 +3160,7 @@
           <a:p>
             <a:fld id="{5BCAD085-E8A6-8845-BD4E-CB4CCA059FC4}" type="datetimeFigureOut">
               <a:rPr lang="en-US" smtClean="0"/>
-              <a:t>3/24/2026</a:t>
+              <a:t>3/28/2026</a:t>
             </a:fld>
             <a:endParaRPr lang="en-US"/>
           </a:p>
@@ -3596,7 +3596,7 @@
         <p:spPr>
           <a:xfrm>
             <a:off x="901561" y="2183844"/>
-            <a:ext cx="6865923" cy="2215991"/>
+            <a:ext cx="6865923" cy="1508105"/>
           </a:xfrm>
           <a:prstGeom prst="rect">
             <a:avLst/>
@@ -3618,7 +3618,7 @@
             </a:pPr>
             <a:r>
               <a:rPr lang="en-US" sz="4600" b="1" dirty="0"/>
-              <a:t>Database Performance Monitoring &amp; Optimization System</a:t>
+              <a:t>API Performance Monitoring</a:t>
             </a:r>
             <a:endParaRPr dirty="0"/>
           </a:p>
@@ -3632,7 +3632,7 @@
         </p:nvSpPr>
         <p:spPr>
           <a:xfrm>
-            <a:off x="901561" y="4399835"/>
+            <a:off x="901561" y="3691949"/>
             <a:ext cx="6492297" cy="276999"/>
           </a:xfrm>
           <a:prstGeom prst="rect">
@@ -3659,13 +3659,8 @@
                   <a:srgbClr val="008577"/>
                 </a:solidFill>
               </a:rPr>
-              <a:t>Real-Time ETL | SLA Tracking | P95/P99 Metrics | Data Quality Monitoring</a:t>
-            </a:r>
-            <a:endParaRPr sz="1200" dirty="0">
-              <a:solidFill>
-                <a:srgbClr val="008577"/>
-              </a:solidFill>
-            </a:endParaRPr>
+              <a:t>Logs → ETL → MySQL → Analytics → Alerts → Power BI Dashboard</a:t>
+            </a:r>
           </a:p>
         </p:txBody>
       </p:sp>
